--- a/AI_for_Finance_Course/Slides/Class_03_Credit_Risk_Modeling.pptx
+++ b/AI_for_Finance_Course/Slides/Class_03_Credit_Risk_Modeling.pptx
@@ -498,6 +498,10 @@
           </p:nvPr>
         </p:nvSpPr>
         <p:spPr/>
+        <p:txBody>
+          <a:bodyPr/>
+          <a:p/>
+        </p:txBody>
       </p:sp>
       <p:sp>
         <p:nvSpPr>
@@ -586,6 +590,10 @@
           </p:nvPr>
         </p:nvSpPr>
         <p:spPr/>
+        <p:txBody>
+          <a:bodyPr/>
+          <a:p/>
+        </p:txBody>
       </p:sp>
       <p:sp>
         <p:nvSpPr>
@@ -674,6 +682,10 @@
           </p:nvPr>
         </p:nvSpPr>
         <p:spPr/>
+        <p:txBody>
+          <a:bodyPr/>
+          <a:p/>
+        </p:txBody>
       </p:sp>
       <p:sp>
         <p:nvSpPr>
@@ -762,6 +774,10 @@
           </p:nvPr>
         </p:nvSpPr>
         <p:spPr/>
+        <p:txBody>
+          <a:bodyPr/>
+          <a:p/>
+        </p:txBody>
       </p:sp>
       <p:sp>
         <p:nvSpPr>
@@ -850,6 +866,10 @@
           </p:nvPr>
         </p:nvSpPr>
         <p:spPr/>
+        <p:txBody>
+          <a:bodyPr/>
+          <a:p/>
+        </p:txBody>
       </p:sp>
       <p:sp>
         <p:nvSpPr>
@@ -938,6 +958,10 @@
           </p:nvPr>
         </p:nvSpPr>
         <p:spPr/>
+        <p:txBody>
+          <a:bodyPr/>
+          <a:p/>
+        </p:txBody>
       </p:sp>
       <p:sp>
         <p:nvSpPr>
@@ -1026,6 +1050,10 @@
           </p:nvPr>
         </p:nvSpPr>
         <p:spPr/>
+        <p:txBody>
+          <a:bodyPr/>
+          <a:p/>
+        </p:txBody>
       </p:sp>
       <p:sp>
         <p:nvSpPr>
@@ -1114,6 +1142,10 @@
           </p:nvPr>
         </p:nvSpPr>
         <p:spPr/>
+        <p:txBody>
+          <a:bodyPr/>
+          <a:p/>
+        </p:txBody>
       </p:sp>
       <p:sp>
         <p:nvSpPr>
@@ -1202,6 +1234,10 @@
           </p:nvPr>
         </p:nvSpPr>
         <p:spPr/>
+        <p:txBody>
+          <a:bodyPr/>
+          <a:p/>
+        </p:txBody>
       </p:sp>
       <p:sp>
         <p:nvSpPr>
@@ -1290,6 +1326,10 @@
           </p:nvPr>
         </p:nvSpPr>
         <p:spPr/>
+        <p:txBody>
+          <a:bodyPr/>
+          <a:p/>
+        </p:txBody>
       </p:sp>
       <p:sp>
         <p:nvSpPr>
@@ -1378,6 +1418,10 @@
           </p:nvPr>
         </p:nvSpPr>
         <p:spPr/>
+        <p:txBody>
+          <a:bodyPr/>
+          <a:p/>
+        </p:txBody>
       </p:sp>
       <p:sp>
         <p:nvSpPr>
@@ -1466,6 +1510,10 @@
           </p:nvPr>
         </p:nvSpPr>
         <p:spPr/>
+        <p:txBody>
+          <a:bodyPr/>
+          <a:p/>
+        </p:txBody>
       </p:sp>
       <p:sp>
         <p:nvSpPr>
@@ -1554,6 +1602,10 @@
           </p:nvPr>
         </p:nvSpPr>
         <p:spPr/>
+        <p:txBody>
+          <a:bodyPr/>
+          <a:p/>
+        </p:txBody>
       </p:sp>
       <p:sp>
         <p:nvSpPr>
@@ -1642,6 +1694,10 @@
           </p:nvPr>
         </p:nvSpPr>
         <p:spPr/>
+        <p:txBody>
+          <a:bodyPr/>
+          <a:p/>
+        </p:txBody>
       </p:sp>
       <p:sp>
         <p:nvSpPr>
@@ -1730,6 +1786,10 @@
           </p:nvPr>
         </p:nvSpPr>
         <p:spPr/>
+        <p:txBody>
+          <a:bodyPr/>
+          <a:p/>
+        </p:txBody>
       </p:sp>
       <p:sp>
         <p:nvSpPr>
@@ -2367,6 +2427,10 @@
           </a:solidFill>
           <a:ln/>
         </p:spPr>
+        <p:txBody>
+          <a:bodyPr/>
+          <a:p/>
+        </p:txBody>
       </p:sp>
       <p:sp>
         <p:nvSpPr>
@@ -2465,6 +2529,10 @@
           </a:solidFill>
           <a:ln/>
         </p:spPr>
+        <p:txBody>
+          <a:bodyPr/>
+          <a:p/>
+        </p:txBody>
       </p:sp>
       <p:sp>
         <p:nvSpPr>
@@ -2602,6 +2670,10 @@
           </a:solidFill>
           <a:ln/>
         </p:spPr>
+        <p:txBody>
+          <a:bodyPr/>
+          <a:p/>
+        </p:txBody>
       </p:sp>
       <p:sp>
         <p:nvSpPr>
@@ -2739,6 +2811,10 @@
           </a:solidFill>
           <a:ln/>
         </p:spPr>
+        <p:txBody>
+          <a:bodyPr/>
+          <a:p/>
+        </p:txBody>
       </p:sp>
       <p:sp>
         <p:nvSpPr>
@@ -2876,6 +2952,10 @@
           </a:solidFill>
           <a:ln/>
         </p:spPr>
+        <p:txBody>
+          <a:bodyPr/>
+          <a:p/>
+        </p:txBody>
       </p:sp>
       <p:sp>
         <p:nvSpPr>
@@ -3045,6 +3125,10 @@
           </a:solidFill>
           <a:ln/>
         </p:spPr>
+        <p:txBody>
+          <a:bodyPr/>
+          <a:p/>
+        </p:txBody>
       </p:sp>
       <p:sp>
         <p:nvSpPr>
@@ -3143,6 +3227,10 @@
           </a:solidFill>
           <a:ln/>
         </p:spPr>
+        <p:txBody>
+          <a:bodyPr/>
+          <a:p/>
+        </p:txBody>
       </p:sp>
       <p:sp>
         <p:nvSpPr>
@@ -3280,6 +3368,10 @@
           </a:solidFill>
           <a:ln/>
         </p:spPr>
+        <p:txBody>
+          <a:bodyPr/>
+          <a:p/>
+        </p:txBody>
       </p:sp>
       <p:sp>
         <p:nvSpPr>
@@ -3417,6 +3509,10 @@
           </a:solidFill>
           <a:ln/>
         </p:spPr>
+        <p:txBody>
+          <a:bodyPr/>
+          <a:p/>
+        </p:txBody>
       </p:sp>
       <p:sp>
         <p:nvSpPr>
@@ -3554,6 +3650,10 @@
           </a:solidFill>
           <a:ln/>
         </p:spPr>
+        <p:txBody>
+          <a:bodyPr/>
+          <a:p/>
+        </p:txBody>
       </p:sp>
       <p:sp>
         <p:nvSpPr>
@@ -3723,6 +3823,10 @@
           </a:solidFill>
           <a:ln/>
         </p:spPr>
+        <p:txBody>
+          <a:bodyPr/>
+          <a:p/>
+        </p:txBody>
       </p:sp>
       <p:sp>
         <p:nvSpPr>
@@ -4171,6 +4275,10 @@
           </a:solidFill>
           <a:ln/>
         </p:spPr>
+        <p:txBody>
+          <a:bodyPr/>
+          <a:p/>
+        </p:txBody>
       </p:sp>
       <p:sp>
         <p:nvSpPr>
@@ -4269,6 +4377,10 @@
           </a:solidFill>
           <a:ln/>
         </p:spPr>
+        <p:txBody>
+          <a:bodyPr/>
+          <a:p/>
+        </p:txBody>
       </p:sp>
       <p:sp>
         <p:nvSpPr>
@@ -4448,6 +4560,10 @@
           </a:solidFill>
           <a:ln/>
         </p:spPr>
+        <p:txBody>
+          <a:bodyPr/>
+          <a:p/>
+        </p:txBody>
       </p:sp>
       <p:sp>
         <p:nvSpPr>
@@ -4627,6 +4743,10 @@
           </a:solidFill>
           <a:ln/>
         </p:spPr>
+        <p:txBody>
+          <a:bodyPr/>
+          <a:p/>
+        </p:txBody>
       </p:sp>
       <p:sp>
         <p:nvSpPr>
@@ -4838,6 +4958,10 @@
           </a:solidFill>
           <a:ln/>
         </p:spPr>
+        <p:txBody>
+          <a:bodyPr/>
+          <a:p/>
+        </p:txBody>
       </p:sp>
       <p:sp>
         <p:nvSpPr>
@@ -4941,6 +5065,10 @@
             <a:prstDash val="solid"/>
           </a:ln>
         </p:spPr>
+        <p:txBody>
+          <a:bodyPr/>
+          <a:p/>
+        </p:txBody>
       </p:sp>
       <p:sp>
         <p:nvSpPr>
@@ -5005,6 +5133,10 @@
             <a:prstDash val="solid"/>
           </a:ln>
         </p:spPr>
+        <p:txBody>
+          <a:bodyPr/>
+          <a:p/>
+        </p:txBody>
       </p:sp>
       <p:sp>
         <p:nvSpPr>
@@ -5069,6 +5201,10 @@
             <a:prstDash val="solid"/>
           </a:ln>
         </p:spPr>
+        <p:txBody>
+          <a:bodyPr/>
+          <a:p/>
+        </p:txBody>
       </p:sp>
       <p:sp>
         <p:nvSpPr>
@@ -5133,6 +5269,10 @@
             <a:prstDash val="solid"/>
           </a:ln>
         </p:spPr>
+        <p:txBody>
+          <a:bodyPr/>
+          <a:p/>
+        </p:txBody>
       </p:sp>
       <p:sp>
         <p:nvSpPr>
@@ -5197,6 +5337,10 @@
             <a:prstDash val="solid"/>
           </a:ln>
         </p:spPr>
+        <p:txBody>
+          <a:bodyPr/>
+          <a:p/>
+        </p:txBody>
       </p:sp>
       <p:sp>
         <p:nvSpPr>
@@ -5341,7 +5485,7 @@
                 <a:ea typeface="Calibri" pitchFamily="34" charset="-122"/>
                 <a:cs typeface="Calibri" pitchFamily="34" charset="-120"/>
               </a:rPr>
-              <a:t>www.proxiant.com</a:t>
+              <a:t>proxiant.ai</a:t>
             </a:r>
             <a:endParaRPr lang="en-US" sz="2800" dirty="0"/>
           </a:p>
@@ -5437,6 +5581,10 @@
           </a:solidFill>
           <a:ln/>
         </p:spPr>
+        <p:txBody>
+          <a:bodyPr/>
+          <a:p/>
+        </p:txBody>
       </p:sp>
       <p:sp>
         <p:nvSpPr>
@@ -5806,6 +5954,10 @@
           </a:solidFill>
           <a:ln/>
         </p:spPr>
+        <p:txBody>
+          <a:bodyPr/>
+          <a:p/>
+        </p:txBody>
       </p:sp>
       <p:sp>
         <p:nvSpPr>
@@ -5904,6 +6056,10 @@
           </a:solidFill>
           <a:ln/>
         </p:spPr>
+        <p:txBody>
+          <a:bodyPr/>
+          <a:p/>
+        </p:txBody>
       </p:sp>
       <p:sp>
         <p:nvSpPr>
@@ -6041,6 +6197,10 @@
           </a:solidFill>
           <a:ln/>
         </p:spPr>
+        <p:txBody>
+          <a:bodyPr/>
+          <a:p/>
+        </p:txBody>
       </p:sp>
       <p:sp>
         <p:nvSpPr>
@@ -6178,6 +6338,10 @@
           </a:solidFill>
           <a:ln/>
         </p:spPr>
+        <p:txBody>
+          <a:bodyPr/>
+          <a:p/>
+        </p:txBody>
       </p:sp>
       <p:sp>
         <p:nvSpPr>
@@ -6315,6 +6479,10 @@
           </a:solidFill>
           <a:ln/>
         </p:spPr>
+        <p:txBody>
+          <a:bodyPr/>
+          <a:p/>
+        </p:txBody>
       </p:sp>
       <p:sp>
         <p:nvSpPr>
@@ -6452,6 +6620,10 @@
           </a:solidFill>
           <a:ln/>
         </p:spPr>
+        <p:txBody>
+          <a:bodyPr/>
+          <a:p/>
+        </p:txBody>
       </p:sp>
       <p:sp>
         <p:nvSpPr>
@@ -6589,6 +6761,10 @@
           </a:solidFill>
           <a:ln/>
         </p:spPr>
+        <p:txBody>
+          <a:bodyPr/>
+          <a:p/>
+        </p:txBody>
       </p:sp>
       <p:sp>
         <p:nvSpPr>
@@ -6758,6 +6934,10 @@
           </a:solidFill>
           <a:ln/>
         </p:spPr>
+        <p:txBody>
+          <a:bodyPr/>
+          <a:p/>
+        </p:txBody>
       </p:sp>
       <p:sp>
         <p:nvSpPr>
@@ -6856,6 +7036,10 @@
           </a:solidFill>
           <a:ln/>
         </p:spPr>
+        <p:txBody>
+          <a:bodyPr/>
+          <a:p/>
+        </p:txBody>
       </p:sp>
       <p:sp>
         <p:nvSpPr>
@@ -7035,6 +7219,10 @@
           </a:solidFill>
           <a:ln/>
         </p:spPr>
+        <p:txBody>
+          <a:bodyPr/>
+          <a:p/>
+        </p:txBody>
       </p:sp>
       <p:sp>
         <p:nvSpPr>
@@ -7214,6 +7402,10 @@
           </a:solidFill>
           <a:ln/>
         </p:spPr>
+        <p:txBody>
+          <a:bodyPr/>
+          <a:p/>
+        </p:txBody>
       </p:sp>
       <p:sp>
         <p:nvSpPr>
@@ -7425,6 +7617,10 @@
           </a:solidFill>
           <a:ln/>
         </p:spPr>
+        <p:txBody>
+          <a:bodyPr/>
+          <a:p/>
+        </p:txBody>
       </p:sp>
       <p:sp>
         <p:nvSpPr>
@@ -7523,6 +7719,10 @@
           </a:solidFill>
           <a:ln/>
         </p:spPr>
+        <p:txBody>
+          <a:bodyPr/>
+          <a:p/>
+        </p:txBody>
       </p:sp>
       <p:sp>
         <p:nvSpPr>
@@ -7660,6 +7860,10 @@
           </a:solidFill>
           <a:ln/>
         </p:spPr>
+        <p:txBody>
+          <a:bodyPr/>
+          <a:p/>
+        </p:txBody>
       </p:sp>
       <p:sp>
         <p:nvSpPr>
@@ -7797,6 +8001,10 @@
           </a:solidFill>
           <a:ln/>
         </p:spPr>
+        <p:txBody>
+          <a:bodyPr/>
+          <a:p/>
+        </p:txBody>
       </p:sp>
       <p:sp>
         <p:nvSpPr>
@@ -7934,6 +8142,10 @@
           </a:solidFill>
           <a:ln/>
         </p:spPr>
+        <p:txBody>
+          <a:bodyPr/>
+          <a:p/>
+        </p:txBody>
       </p:sp>
       <p:sp>
         <p:nvSpPr>
@@ -8071,6 +8283,10 @@
           </a:solidFill>
           <a:ln/>
         </p:spPr>
+        <p:txBody>
+          <a:bodyPr/>
+          <a:p/>
+        </p:txBody>
       </p:sp>
       <p:sp>
         <p:nvSpPr>
@@ -8240,6 +8456,10 @@
           </a:solidFill>
           <a:ln/>
         </p:spPr>
+        <p:txBody>
+          <a:bodyPr/>
+          <a:p/>
+        </p:txBody>
       </p:sp>
       <p:sp>
         <p:nvSpPr>
@@ -8338,6 +8558,10 @@
           </a:solidFill>
           <a:ln/>
         </p:spPr>
+        <p:txBody>
+          <a:bodyPr/>
+          <a:p/>
+        </p:txBody>
       </p:sp>
       <p:sp>
         <p:nvSpPr>
@@ -8436,6 +8660,10 @@
           </a:solidFill>
           <a:ln/>
         </p:spPr>
+        <p:txBody>
+          <a:bodyPr/>
+          <a:p/>
+        </p:txBody>
       </p:sp>
       <p:sp>
         <p:nvSpPr>
@@ -8534,6 +8762,10 @@
           </a:solidFill>
           <a:ln/>
         </p:spPr>
+        <p:txBody>
+          <a:bodyPr/>
+          <a:p/>
+        </p:txBody>
       </p:sp>
       <p:sp>
         <p:nvSpPr>
@@ -8632,6 +8864,10 @@
           </a:solidFill>
           <a:ln/>
         </p:spPr>
+        <p:txBody>
+          <a:bodyPr/>
+          <a:p/>
+        </p:txBody>
       </p:sp>
       <p:sp>
         <p:nvSpPr>
@@ -8730,6 +8966,10 @@
           </a:solidFill>
           <a:ln/>
         </p:spPr>
+        <p:txBody>
+          <a:bodyPr/>
+          <a:p/>
+        </p:txBody>
       </p:sp>
       <p:sp>
         <p:nvSpPr>
@@ -8860,6 +9100,10 @@
           </a:solidFill>
           <a:ln/>
         </p:spPr>
+        <p:txBody>
+          <a:bodyPr/>
+          <a:p/>
+        </p:txBody>
       </p:sp>
       <p:sp>
         <p:nvSpPr>
@@ -8963,6 +9207,10 @@
             <a:prstDash val="solid"/>
           </a:ln>
         </p:spPr>
+        <p:txBody>
+          <a:bodyPr/>
+          <a:p/>
+        </p:txBody>
       </p:sp>
       <p:sp>
         <p:nvSpPr>
@@ -9027,6 +9275,10 @@
             <a:prstDash val="solid"/>
           </a:ln>
         </p:spPr>
+        <p:txBody>
+          <a:bodyPr/>
+          <a:p/>
+        </p:txBody>
       </p:sp>
       <p:sp>
         <p:nvSpPr>
@@ -9091,6 +9343,10 @@
             <a:prstDash val="solid"/>
           </a:ln>
         </p:spPr>
+        <p:txBody>
+          <a:bodyPr/>
+          <a:p/>
+        </p:txBody>
       </p:sp>
       <p:sp>
         <p:nvSpPr>
@@ -9155,6 +9411,10 @@
             <a:prstDash val="solid"/>
           </a:ln>
         </p:spPr>
+        <p:txBody>
+          <a:bodyPr/>
+          <a:p/>
+        </p:txBody>
       </p:sp>
       <p:sp>
         <p:nvSpPr>
@@ -9219,6 +9479,10 @@
             <a:prstDash val="solid"/>
           </a:ln>
         </p:spPr>
+        <p:txBody>
+          <a:bodyPr/>
+          <a:p/>
+        </p:txBody>
       </p:sp>
       <p:sp>
         <p:nvSpPr>
@@ -9310,6 +9574,10 @@
           </a:solidFill>
           <a:ln/>
         </p:spPr>
+        <p:txBody>
+          <a:bodyPr/>
+          <a:p/>
+        </p:txBody>
       </p:sp>
       <p:sp>
         <p:nvSpPr>
@@ -9447,6 +9715,10 @@
           </a:solidFill>
           <a:ln/>
         </p:spPr>
+        <p:txBody>
+          <a:bodyPr/>
+          <a:p/>
+        </p:txBody>
       </p:sp>
       <p:sp>
         <p:nvSpPr>
@@ -9545,6 +9817,10 @@
           </a:solidFill>
           <a:ln/>
         </p:spPr>
+        <p:txBody>
+          <a:bodyPr/>
+          <a:p/>
+        </p:txBody>
       </p:sp>
       <p:sp>
         <p:nvSpPr>
@@ -9643,6 +9919,10 @@
           </a:solidFill>
           <a:ln/>
         </p:spPr>
+        <p:txBody>
+          <a:bodyPr/>
+          <a:p/>
+        </p:txBody>
       </p:sp>
       <p:sp>
         <p:nvSpPr>
@@ -9741,6 +10021,10 @@
           </a:solidFill>
           <a:ln/>
         </p:spPr>
+        <p:txBody>
+          <a:bodyPr/>
+          <a:p/>
+        </p:txBody>
       </p:sp>
       <p:sp>
         <p:nvSpPr>
@@ -9871,6 +10155,10 @@
           </a:solidFill>
           <a:ln/>
         </p:spPr>
+        <p:txBody>
+          <a:bodyPr/>
+          <a:p/>
+        </p:txBody>
       </p:sp>
       <p:sp>
         <p:nvSpPr>
@@ -9969,6 +10257,10 @@
           </a:solidFill>
           <a:ln/>
         </p:spPr>
+        <p:txBody>
+          <a:bodyPr/>
+          <a:p/>
+        </p:txBody>
       </p:sp>
       <p:sp>
         <p:nvSpPr>
@@ -10067,6 +10359,10 @@
           </a:solidFill>
           <a:ln/>
         </p:spPr>
+        <p:txBody>
+          <a:bodyPr/>
+          <a:p/>
+        </p:txBody>
       </p:sp>
       <p:sp>
         <p:nvSpPr>
@@ -10165,6 +10461,10 @@
           </a:solidFill>
           <a:ln/>
         </p:spPr>
+        <p:txBody>
+          <a:bodyPr/>
+          <a:p/>
+        </p:txBody>
       </p:sp>
       <p:sp>
         <p:nvSpPr>
@@ -10263,6 +10563,10 @@
           </a:solidFill>
           <a:ln/>
         </p:spPr>
+        <p:txBody>
+          <a:bodyPr/>
+          <a:p/>
+        </p:txBody>
       </p:sp>
       <p:sp>
         <p:nvSpPr>
